--- a/PPTs/L0 course overview.pptx
+++ b/PPTs/L0 course overview.pptx
@@ -293,7 +293,7 @@
           <a:p>
             <a:fld id="{42A0EB13-15AA-4F17-85B5-7D7BBF18EB40}" type="datetimeFigureOut">
               <a:rPr lang="en-SE" smtClean="0"/>
-              <a:t>09/01/2026</a:t>
+              <a:t>10/07/2026</a:t>
             </a:fld>
             <a:endParaRPr lang="en-SE"/>
           </a:p>
@@ -940,7 +940,7 @@
           <a:p>
             <a:fld id="{FB221443-D73C-634A-A910-7320408C156D}" type="datetimeFigureOut">
               <a:rPr lang="en-US" smtClean="0"/>
-              <a:t>9/1/2026</a:t>
+              <a:t>10/7/2026</a:t>
             </a:fld>
             <a:endParaRPr lang="en-US"/>
           </a:p>
@@ -1110,7 +1110,7 @@
           <a:p>
             <a:fld id="{FB221443-D73C-634A-A910-7320408C156D}" type="datetimeFigureOut">
               <a:rPr lang="en-US" smtClean="0"/>
-              <a:t>9/1/2026</a:t>
+              <a:t>10/7/2026</a:t>
             </a:fld>
             <a:endParaRPr lang="en-US"/>
           </a:p>
@@ -1290,7 +1290,7 @@
           <a:p>
             <a:fld id="{FB221443-D73C-634A-A910-7320408C156D}" type="datetimeFigureOut">
               <a:rPr lang="en-US" smtClean="0"/>
-              <a:t>9/1/2026</a:t>
+              <a:t>10/7/2026</a:t>
             </a:fld>
             <a:endParaRPr lang="en-US"/>
           </a:p>
@@ -1460,7 +1460,7 @@
           <a:p>
             <a:fld id="{FB221443-D73C-634A-A910-7320408C156D}" type="datetimeFigureOut">
               <a:rPr lang="en-US" smtClean="0"/>
-              <a:t>9/1/2026</a:t>
+              <a:t>10/7/2026</a:t>
             </a:fld>
             <a:endParaRPr lang="en-US"/>
           </a:p>
@@ -1706,7 +1706,7 @@
           <a:p>
             <a:fld id="{FB221443-D73C-634A-A910-7320408C156D}" type="datetimeFigureOut">
               <a:rPr lang="en-US" smtClean="0"/>
-              <a:t>9/1/2026</a:t>
+              <a:t>10/7/2026</a:t>
             </a:fld>
             <a:endParaRPr lang="en-US"/>
           </a:p>
@@ -1994,7 +1994,7 @@
           <a:p>
             <a:fld id="{FB221443-D73C-634A-A910-7320408C156D}" type="datetimeFigureOut">
               <a:rPr lang="en-US" smtClean="0"/>
-              <a:t>9/1/2026</a:t>
+              <a:t>10/7/2026</a:t>
             </a:fld>
             <a:endParaRPr lang="en-US"/>
           </a:p>
@@ -2416,7 +2416,7 @@
           <a:p>
             <a:fld id="{FB221443-D73C-634A-A910-7320408C156D}" type="datetimeFigureOut">
               <a:rPr lang="en-US" smtClean="0"/>
-              <a:t>9/1/2026</a:t>
+              <a:t>10/7/2026</a:t>
             </a:fld>
             <a:endParaRPr lang="en-US"/>
           </a:p>
@@ -2534,7 +2534,7 @@
           <a:p>
             <a:fld id="{FB221443-D73C-634A-A910-7320408C156D}" type="datetimeFigureOut">
               <a:rPr lang="en-US" smtClean="0"/>
-              <a:t>9/1/2026</a:t>
+              <a:t>10/7/2026</a:t>
             </a:fld>
             <a:endParaRPr lang="en-US"/>
           </a:p>
@@ -2629,7 +2629,7 @@
           <a:p>
             <a:fld id="{FB221443-D73C-634A-A910-7320408C156D}" type="datetimeFigureOut">
               <a:rPr lang="en-US" smtClean="0"/>
-              <a:t>9/1/2026</a:t>
+              <a:t>10/7/2026</a:t>
             </a:fld>
             <a:endParaRPr lang="en-US"/>
           </a:p>
@@ -2906,7 +2906,7 @@
           <a:p>
             <a:fld id="{FB221443-D73C-634A-A910-7320408C156D}" type="datetimeFigureOut">
               <a:rPr lang="en-US" smtClean="0"/>
-              <a:t>9/1/2026</a:t>
+              <a:t>10/7/2026</a:t>
             </a:fld>
             <a:endParaRPr lang="en-US"/>
           </a:p>
@@ -3159,7 +3159,7 @@
           <a:p>
             <a:fld id="{FB221443-D73C-634A-A910-7320408C156D}" type="datetimeFigureOut">
               <a:rPr lang="en-US" smtClean="0"/>
-              <a:t>9/1/2026</a:t>
+              <a:t>10/7/2026</a:t>
             </a:fld>
             <a:endParaRPr lang="en-US"/>
           </a:p>
@@ -3372,7 +3372,7 @@
           <a:p>
             <a:fld id="{FB221443-D73C-634A-A910-7320408C156D}" type="datetimeFigureOut">
               <a:rPr lang="en-US" smtClean="0"/>
-              <a:t>9/1/2026</a:t>
+              <a:t>10/7/2026</a:t>
             </a:fld>
             <a:endParaRPr lang="en-US"/>
           </a:p>
@@ -4120,7 +4120,7 @@
             </a:r>
             <a:r>
               <a:rPr lang="en-US" altLang="zh-CN" dirty="0"/>
-              <a:t>MW 8:00 PM-9:40 PM, </a:t>
+              <a:t>MW 8:00–9:40 AM, </a:t>
             </a:r>
             <a:r>
               <a:rPr lang="en-US" dirty="0"/>
@@ -4259,7 +4259,7 @@
             <a:pPr lvl="1"/>
             <a:r>
               <a:rPr lang="en-GB" dirty="0"/>
-              <a:t>Available on discord and on</a:t>
+              <a:t>Available on Discord and on</a:t>
             </a:r>
             <a:r>
               <a:rPr lang="en-US" dirty="0"/>
@@ -4394,7 +4394,7 @@
           <a:p>
             <a:r>
               <a:rPr lang="en-US" altLang="zh-CN" dirty="0"/>
-              <a:t>Three</a:t>
+              <a:t>Two</a:t>
             </a:r>
             <a:r>
               <a:rPr lang="en-US" dirty="0"/>
@@ -4425,7 +4425,7 @@
                 </a:solidFill>
                 <a:latin typeface="Times New Roman" panose="02020603050405020304" pitchFamily="18" charset="0"/>
               </a:rPr>
-              <a:t>Each student is allowed a total of 3 late days for this class, which may be spent in units of one day (24 hours) on any project(s) throughout the semester. Once your late days have been used up, late work will not receive any credit. Late days are intended to handle all issues, including unexpected problems such as illness. </a:t>
+              <a:t>Each student is allowed a total of 3 late days for this class, which may be spent in units of one day (24 hours) on any lab(s) throughout the semester. Once your late days have been used up, late work will not receive any credit. Late days are intended to handle all issues, including unexpected problems such as illness. </a:t>
             </a:r>
           </a:p>
           <a:p>
